--- a/presentation/submission/260916_AI활용_업무지침네비게이터_6차 수정.pptx
+++ b/presentation/submission/260916_AI활용_업무지침네비게이터_6차 수정.pptx
@@ -546,6 +546,86 @@
     </p:spTree>
     <p:extLst>
       <p:ext uri="{BB962C8B-B14F-4D97-AF65-F5344CB8AC3E}">
+        <p14:creationId xmlns:p14="http://schemas.microsoft.com/office/powerpoint/2010/main" val="2192358967"/>
+      </p:ext>
+    </p:extLst>
+  </p:cSld>
+  <p:clrMapOvr>
+    <a:masterClrMapping/>
+  </p:clrMapOvr>
+</p:notes>
+</file>
+
+<file path=ppt/notesSlides/notesSlide4.xml><?xml version="1.0" encoding="utf-8"?>
+<p:notes xmlns:a="http://schemas.openxmlformats.org/drawingml/2006/main" xmlns:r="http://schemas.openxmlformats.org/officeDocument/2006/relationships" xmlns:p="http://schemas.openxmlformats.org/presentationml/2006/main">
+  <p:cSld>
+    <p:spTree>
+      <p:nvGrpSpPr>
+        <p:cNvPr id="1" name=""/>
+        <p:cNvGrpSpPr/>
+        <p:nvPr/>
+      </p:nvGrpSpPr>
+      <p:grpSpPr>
+        <a:xfrm>
+          <a:off x="0" y="0"/>
+          <a:ext cx="0" cy="0"/>
+          <a:chOff x="0" y="0"/>
+          <a:chExt cx="0" cy="0"/>
+        </a:xfrm>
+      </p:grpSpPr>
+      <p:sp>
+        <p:nvSpPr>
+          <p:cNvPr id="2" name="슬라이드 이미지 개체 틀 1"/>
+          <p:cNvSpPr>
+            <a:spLocks noGrp="1" noRot="1" noChangeAspect="1"/>
+          </p:cNvSpPr>
+          <p:nvPr>
+            <p:ph type="sldImg"/>
+          </p:nvPr>
+        </p:nvSpPr>
+        <p:spPr/>
+      </p:sp>
+      <p:sp>
+        <p:nvSpPr>
+          <p:cNvPr id="3" name="슬라이드 노트 개체 틀 2"/>
+          <p:cNvSpPr>
+            <a:spLocks noGrp="1"/>
+          </p:cNvSpPr>
+          <p:nvPr>
+            <p:ph type="body" idx="1"/>
+          </p:nvPr>
+        </p:nvSpPr>
+        <p:spPr/>
+        <p:txBody>
+          <a:bodyPr/>
+          <a:lstStyle/>
+          <a:p>
+            <a:endParaRPr lang="ko-KR" altLang="en-US"/>
+          </a:p>
+        </p:txBody>
+      </p:sp>
+      <p:sp>
+        <p:nvSpPr>
+          <p:cNvPr id="4" name="슬라이드 번호 개체 틀 3"/>
+          <p:cNvSpPr>
+            <a:spLocks noGrp="1"/>
+          </p:cNvSpPr>
+          <p:nvPr>
+            <p:ph type="sldNum" sz="quarter" idx="5"/>
+          </p:nvPr>
+        </p:nvSpPr>
+        <p:spPr/>
+        <p:txBody>
+          <a:bodyPr/>
+          <a:lstStyle/>
+          <a:p>
+            <a:endParaRPr lang="ko-KR" altLang="en-US"/>
+          </a:p>
+        </p:txBody>
+      </p:sp>
+    </p:spTree>
+    <p:extLst>
+      <p:ext uri="{BB962C8B-B14F-4D97-AF65-F5344CB8AC3E}">
         <p14:creationId xmlns:p14="http://schemas.microsoft.com/office/powerpoint/2010/main" val="4285272690"/>
       </p:ext>
     </p:extLst>
@@ -556,7 +636,7 @@
 </p:notes>
 </file>
 
-<file path=ppt/notesSlides/notesSlide4.xml><?xml version="1.0" encoding="utf-8"?>
+<file path=ppt/notesSlides/notesSlide5.xml><?xml version="1.0" encoding="utf-8"?>
 <p:notes xmlns:a="http://schemas.openxmlformats.org/drawingml/2006/main" xmlns:r="http://schemas.openxmlformats.org/officeDocument/2006/relationships" xmlns:p="http://schemas.openxmlformats.org/presentationml/2006/main">
   <p:cSld>
     <p:spTree>
@@ -10972,13 +11052,13 @@
           <p:nvPr/>
         </p:nvPicPr>
         <p:blipFill>
-          <a:blip r:embed="rId2">
+          <a:blip r:embed="rId3">
             <a:extLst>
               <a:ext uri="{28A0092B-C50C-407E-A947-70E740481C1C}">
                 <a14:useLocalDpi xmlns:a14="http://schemas.microsoft.com/office/drawing/2010/main" val="0"/>
               </a:ext>
               <a:ext uri="{96DAC541-7B7A-43D3-8B79-37D633B846F1}">
-                <asvg:svgBlip xmlns:asvg="http://schemas.microsoft.com/office/drawing/2016/SVG/main" r:embed="rId3"/>
+                <asvg:svgBlip xmlns:asvg="http://schemas.microsoft.com/office/drawing/2016/SVG/main" r:embed="rId4"/>
               </a:ext>
             </a:extLst>
           </a:blip>
@@ -11011,13 +11091,13 @@
           <p:nvPr/>
         </p:nvPicPr>
         <p:blipFill>
-          <a:blip r:embed="rId2">
+          <a:blip r:embed="rId3">
             <a:extLst>
               <a:ext uri="{28A0092B-C50C-407E-A947-70E740481C1C}">
                 <a14:useLocalDpi xmlns:a14="http://schemas.microsoft.com/office/drawing/2010/main" val="0"/>
               </a:ext>
               <a:ext uri="{96DAC541-7B7A-43D3-8B79-37D633B846F1}">
-                <asvg:svgBlip xmlns:asvg="http://schemas.microsoft.com/office/drawing/2016/SVG/main" r:embed="rId3"/>
+                <asvg:svgBlip xmlns:asvg="http://schemas.microsoft.com/office/drawing/2016/SVG/main" r:embed="rId4"/>
               </a:ext>
             </a:extLst>
           </a:blip>
@@ -11629,7 +11709,7 @@
             <p:nvPr/>
           </p:nvPicPr>
           <p:blipFill>
-            <a:blip r:embed="rId4" cstate="print"/>
+            <a:blip r:embed="rId5" cstate="print"/>
             <a:srcRect/>
             <a:stretch>
               <a:fillRect/>
@@ -11663,7 +11743,7 @@
           <p:nvPr/>
         </p:nvPicPr>
         <p:blipFill rotWithShape="1">
-          <a:blip r:embed="rId5"/>
+          <a:blip r:embed="rId6"/>
           <a:stretch/>
         </p:blipFill>
         <p:spPr>
@@ -12407,36 +12487,6 @@
           <p:nvPr/>
         </p:nvPicPr>
         <p:blipFill>
-          <a:blip r:embed="rId6"/>
-          <a:stretch>
-            <a:fillRect/>
-          </a:stretch>
-        </p:blipFill>
-        <p:spPr>
-          <a:xfrm>
-            <a:off x="3504519" y="4934795"/>
-            <a:ext cx="329184" cy="329184"/>
-          </a:xfrm>
-          <a:prstGeom prst="rect">
-            <a:avLst/>
-          </a:prstGeom>
-        </p:spPr>
-      </p:pic>
-      <p:pic>
-        <p:nvPicPr>
-          <p:cNvPr id="66" name="Image 3" descr="/tmp/claude-0/-home-claude/946d89a8-cd71-5282-af60-49c1ab8579af/scratchpad/work/assets/users_blue.png">
-            <a:extLst>
-              <a:ext uri="{FF2B5EF4-FFF2-40B4-BE49-F238E27FC236}">
-                <a16:creationId xmlns:a16="http://schemas.microsoft.com/office/drawing/2014/main" id="{1EA4566F-5A70-4095-8FBB-BCF2BAE1242A}"/>
-              </a:ext>
-            </a:extLst>
-          </p:cNvPr>
-          <p:cNvPicPr>
-            <a:picLocks noChangeAspect="1"/>
-          </p:cNvPicPr>
-          <p:nvPr/>
-        </p:nvPicPr>
-        <p:blipFill>
           <a:blip r:embed="rId7"/>
           <a:stretch>
             <a:fillRect/>
@@ -12444,6 +12494,36 @@
         </p:blipFill>
         <p:spPr>
           <a:xfrm>
+            <a:off x="3504519" y="4934795"/>
+            <a:ext cx="329184" cy="329184"/>
+          </a:xfrm>
+          <a:prstGeom prst="rect">
+            <a:avLst/>
+          </a:prstGeom>
+        </p:spPr>
+      </p:pic>
+      <p:pic>
+        <p:nvPicPr>
+          <p:cNvPr id="66" name="Image 3" descr="/tmp/claude-0/-home-claude/946d89a8-cd71-5282-af60-49c1ab8579af/scratchpad/work/assets/users_blue.png">
+            <a:extLst>
+              <a:ext uri="{FF2B5EF4-FFF2-40B4-BE49-F238E27FC236}">
+                <a16:creationId xmlns:a16="http://schemas.microsoft.com/office/drawing/2014/main" id="{1EA4566F-5A70-4095-8FBB-BCF2BAE1242A}"/>
+              </a:ext>
+            </a:extLst>
+          </p:cNvPr>
+          <p:cNvPicPr>
+            <a:picLocks noChangeAspect="1"/>
+          </p:cNvPicPr>
+          <p:nvPr/>
+        </p:nvPicPr>
+        <p:blipFill>
+          <a:blip r:embed="rId8"/>
+          <a:stretch>
+            <a:fillRect/>
+          </a:stretch>
+        </p:blipFill>
+        <p:spPr>
+          <a:xfrm>
             <a:off x="717176" y="4965968"/>
             <a:ext cx="329184" cy="329184"/>
           </a:xfrm>
@@ -12467,13 +12547,13 @@
           <p:nvPr/>
         </p:nvPicPr>
         <p:blipFill>
-          <a:blip r:embed="rId8">
+          <a:blip r:embed="rId9">
             <a:extLst>
               <a:ext uri="{28A0092B-C50C-407E-A947-70E740481C1C}">
                 <a14:useLocalDpi xmlns:a14="http://schemas.microsoft.com/office/drawing/2010/main" val="0"/>
               </a:ext>
               <a:ext uri="{96DAC541-7B7A-43D3-8B79-37D633B846F1}">
-                <asvg:svgBlip xmlns:asvg="http://schemas.microsoft.com/office/drawing/2016/SVG/main" r:embed="rId9"/>
+                <asvg:svgBlip xmlns:asvg="http://schemas.microsoft.com/office/drawing/2016/SVG/main" r:embed="rId10"/>
               </a:ext>
             </a:extLst>
           </a:blip>
@@ -13002,7 +13082,7 @@
             <p:nvPr/>
           </p:nvPicPr>
           <p:blipFill>
-            <a:blip r:embed="rId4" cstate="print"/>
+            <a:blip r:embed="rId5" cstate="print"/>
             <a:srcRect/>
             <a:stretch>
               <a:fillRect/>
@@ -17860,7 +17940,7 @@
         <p:spPr>
           <a:xfrm>
             <a:off x="556286" y="3739872"/>
-            <a:ext cx="9020791" cy="399999"/>
+            <a:ext cx="9020791" cy="406475"/>
           </a:xfrm>
           <a:prstGeom prst="rect">
             <a:avLst/>
@@ -17944,15 +18024,8 @@
               <a:t>투자</a:t>
             </a:r>
             <a:r>
-              <a:rPr lang="en-US" altLang="ko-KR" sz="1400" spc="-20">
-                <a:solidFill>
-                  <a:prstClr val="black"/>
-                </a:solidFill>
-                <a:latin typeface="맑은 고딕"/>
-                <a:ea typeface="맑은 고딕" panose="020B0503020000020004" pitchFamily="50" charset="-127"/>
-                <a:sym typeface="Wingdings" pitchFamily="2" charset="2"/>
-              </a:rPr>
-              <a:t>/</a:t>
+              <a:rPr lang="en-US" altLang="ko-KR" sz="1400"/>
+              <a:t>·</a:t>
             </a:r>
             <a:r>
               <a:rPr lang="ko-KR" altLang="en-US" sz="1400" spc="-20">

--- a/presentation/submission/260916_AI활용_업무지침네비게이터_6차 수정.pptx
+++ b/presentation/submission/260916_AI활용_업무지침네비게이터_6차 수정.pptx
@@ -10,7 +10,7 @@
   <p:sldIdLst>
     <p:sldId id="256" r:id="rId2"/>
     <p:sldId id="284" r:id="rId3"/>
-    <p:sldId id="285" r:id="rId4"/>
+    <p:sldId id="289" r:id="rId4"/>
     <p:sldId id="279" r:id="rId5"/>
     <p:sldId id="287" r:id="rId6"/>
     <p:sldId id="280" r:id="rId7"/>
@@ -847,7 +847,7 @@
           <a:p>
             <a:fld id="{6AC0F0B2-DC44-4D7F-B9BC-23EB46679998}" type="datetimeFigureOut">
               <a:rPr lang="ko-KR" altLang="en-US" smtClean="0"/>
-              <a:t>2026-09-13</a:t>
+              <a:t>2026-09-14</a:t>
             </a:fld>
             <a:endParaRPr lang="ko-KR" altLang="en-US"/>
           </a:p>
@@ -1017,7 +1017,7 @@
           <a:p>
             <a:fld id="{6AC0F0B2-DC44-4D7F-B9BC-23EB46679998}" type="datetimeFigureOut">
               <a:rPr lang="ko-KR" altLang="en-US" smtClean="0"/>
-              <a:t>2026-09-13</a:t>
+              <a:t>2026-09-14</a:t>
             </a:fld>
             <a:endParaRPr lang="ko-KR" altLang="en-US"/>
           </a:p>
@@ -1197,7 +1197,7 @@
           <a:p>
             <a:fld id="{6AC0F0B2-DC44-4D7F-B9BC-23EB46679998}" type="datetimeFigureOut">
               <a:rPr lang="ko-KR" altLang="en-US" smtClean="0"/>
-              <a:t>2026-09-13</a:t>
+              <a:t>2026-09-14</a:t>
             </a:fld>
             <a:endParaRPr lang="ko-KR" altLang="en-US"/>
           </a:p>
@@ -1367,7 +1367,7 @@
           <a:p>
             <a:fld id="{6AC0F0B2-DC44-4D7F-B9BC-23EB46679998}" type="datetimeFigureOut">
               <a:rPr lang="ko-KR" altLang="en-US" smtClean="0"/>
-              <a:t>2026-09-13</a:t>
+              <a:t>2026-09-14</a:t>
             </a:fld>
             <a:endParaRPr lang="ko-KR" altLang="en-US"/>
           </a:p>
@@ -1611,7 +1611,7 @@
           <a:p>
             <a:fld id="{6AC0F0B2-DC44-4D7F-B9BC-23EB46679998}" type="datetimeFigureOut">
               <a:rPr lang="ko-KR" altLang="en-US" smtClean="0"/>
-              <a:t>2026-09-13</a:t>
+              <a:t>2026-09-14</a:t>
             </a:fld>
             <a:endParaRPr lang="ko-KR" altLang="en-US"/>
           </a:p>
@@ -1843,7 +1843,7 @@
           <a:p>
             <a:fld id="{6AC0F0B2-DC44-4D7F-B9BC-23EB46679998}" type="datetimeFigureOut">
               <a:rPr lang="ko-KR" altLang="en-US" smtClean="0"/>
-              <a:t>2026-09-13</a:t>
+              <a:t>2026-09-14</a:t>
             </a:fld>
             <a:endParaRPr lang="ko-KR" altLang="en-US"/>
           </a:p>
@@ -2210,7 +2210,7 @@
           <a:p>
             <a:fld id="{6AC0F0B2-DC44-4D7F-B9BC-23EB46679998}" type="datetimeFigureOut">
               <a:rPr lang="ko-KR" altLang="en-US" smtClean="0"/>
-              <a:t>2026-09-13</a:t>
+              <a:t>2026-09-14</a:t>
             </a:fld>
             <a:endParaRPr lang="ko-KR" altLang="en-US"/>
           </a:p>
@@ -2328,7 +2328,7 @@
           <a:p>
             <a:fld id="{6AC0F0B2-DC44-4D7F-B9BC-23EB46679998}" type="datetimeFigureOut">
               <a:rPr lang="ko-KR" altLang="en-US" smtClean="0"/>
-              <a:t>2026-09-13</a:t>
+              <a:t>2026-09-14</a:t>
             </a:fld>
             <a:endParaRPr lang="ko-KR" altLang="en-US"/>
           </a:p>
@@ -2423,7 +2423,7 @@
           <a:p>
             <a:fld id="{6AC0F0B2-DC44-4D7F-B9BC-23EB46679998}" type="datetimeFigureOut">
               <a:rPr lang="ko-KR" altLang="en-US" smtClean="0"/>
-              <a:t>2026-09-13</a:t>
+              <a:t>2026-09-14</a:t>
             </a:fld>
             <a:endParaRPr lang="ko-KR" altLang="en-US"/>
           </a:p>
@@ -2700,7 +2700,7 @@
           <a:p>
             <a:fld id="{6AC0F0B2-DC44-4D7F-B9BC-23EB46679998}" type="datetimeFigureOut">
               <a:rPr lang="ko-KR" altLang="en-US" smtClean="0"/>
-              <a:t>2026-09-13</a:t>
+              <a:t>2026-09-14</a:t>
             </a:fld>
             <a:endParaRPr lang="ko-KR" altLang="en-US"/>
           </a:p>
@@ -2957,7 +2957,7 @@
           <a:p>
             <a:fld id="{6AC0F0B2-DC44-4D7F-B9BC-23EB46679998}" type="datetimeFigureOut">
               <a:rPr lang="ko-KR" altLang="en-US" smtClean="0"/>
-              <a:t>2026-09-13</a:t>
+              <a:t>2026-09-14</a:t>
             </a:fld>
             <a:endParaRPr lang="ko-KR" altLang="en-US"/>
           </a:p>
@@ -3170,7 +3170,7 @@
           <a:p>
             <a:fld id="{6AC0F0B2-DC44-4D7F-B9BC-23EB46679998}" type="datetimeFigureOut">
               <a:rPr lang="ko-KR" altLang="en-US" smtClean="0"/>
-              <a:t>2026-09-13</a:t>
+              <a:t>2026-09-14</a:t>
             </a:fld>
             <a:endParaRPr lang="ko-KR" altLang="en-US"/>
           </a:p>
@@ -6846,74 +6846,6 @@
                 <a:ea typeface="맑은 고딕" panose="020B0503020000020004" pitchFamily="50" charset="-127"/>
                 <a:cs typeface="+mn-cs"/>
               </a:rPr>
-              <a:t>RAGAS </a:t>
-            </a:r>
-            <a:r>
-              <a:rPr kumimoji="0" lang="ko-KR" altLang="en-US" sz="2000" b="1" i="0" u="none" strike="noStrike" kern="1200" cap="none" spc="-100" normalizeH="0" baseline="0" noProof="0">
-                <a:ln>
-                  <a:noFill/>
-                </a:ln>
-                <a:solidFill>
-                  <a:prstClr val="black"/>
-                </a:solidFill>
-                <a:effectLst/>
-                <a:uLnTx/>
-                <a:uFillTx/>
-                <a:latin typeface="맑은 고딕" panose="020B0503020000020004" pitchFamily="50" charset="-127"/>
-                <a:ea typeface="맑은 고딕" panose="020B0503020000020004" pitchFamily="50" charset="-127"/>
-                <a:cs typeface="+mn-cs"/>
-              </a:rPr>
-              <a:t>평가까지</a:t>
-            </a:r>
-            <a:r>
-              <a:rPr kumimoji="0" lang="en-US" altLang="ko-KR" sz="2000" b="1" i="0" u="none" strike="noStrike" kern="1200" cap="none" spc="-100" normalizeH="0" baseline="0" noProof="0">
-                <a:ln>
-                  <a:noFill/>
-                </a:ln>
-                <a:solidFill>
-                  <a:prstClr val="black"/>
-                </a:solidFill>
-                <a:effectLst/>
-                <a:uLnTx/>
-                <a:uFillTx/>
-                <a:latin typeface="맑은 고딕" panose="020B0503020000020004" pitchFamily="50" charset="-127"/>
-                <a:ea typeface="맑은 고딕" panose="020B0503020000020004" pitchFamily="50" charset="-127"/>
-                <a:cs typeface="+mn-cs"/>
-              </a:rPr>
-              <a:t>,</a:t>
-            </a:r>
-            <a:r>
-              <a:rPr kumimoji="0" lang="ko-KR" altLang="en-US" sz="2000" b="1" i="0" u="none" strike="noStrike" kern="1200" cap="none" spc="-100" normalizeH="0" baseline="0" noProof="0">
-                <a:ln>
-                  <a:noFill/>
-                </a:ln>
-                <a:solidFill>
-                  <a:prstClr val="black"/>
-                </a:solidFill>
-                <a:effectLst/>
-                <a:uLnTx/>
-                <a:uFillTx/>
-                <a:latin typeface="맑은 고딕" panose="020B0503020000020004" pitchFamily="50" charset="-127"/>
-                <a:ea typeface="맑은 고딕" panose="020B0503020000020004" pitchFamily="50" charset="-127"/>
-                <a:cs typeface="+mn-cs"/>
-              </a:rPr>
-              <a:t> </a:t>
-            </a:r>
-            <a:r>
-              <a:rPr kumimoji="0" lang="en-US" altLang="ko-KR" sz="2000" b="1" i="0" u="none" strike="noStrike" kern="1200" cap="none" spc="-100" normalizeH="0" baseline="0" noProof="0">
-                <a:ln>
-                  <a:noFill/>
-                </a:ln>
-                <a:solidFill>
-                  <a:prstClr val="black"/>
-                </a:solidFill>
-                <a:effectLst/>
-                <a:uLnTx/>
-                <a:uFillTx/>
-                <a:latin typeface="맑은 고딕" panose="020B0503020000020004" pitchFamily="50" charset="-127"/>
-                <a:ea typeface="맑은 고딕" panose="020B0503020000020004" pitchFamily="50" charset="-127"/>
-                <a:cs typeface="+mn-cs"/>
-              </a:rPr>
               <a:t>RAG</a:t>
             </a:r>
             <a:r>
@@ -6924,7 +6856,27 @@
                 <a:latin typeface="맑은 고딕" panose="020B0503020000020004" pitchFamily="50" charset="-127"/>
                 <a:ea typeface="맑은 고딕" panose="020B0503020000020004" pitchFamily="50" charset="-127"/>
               </a:rPr>
-              <a:t> 개발 과정</a:t>
+              <a:t> 검증 체계까지 </a:t>
+            </a:r>
+            <a:r>
+              <a:rPr lang="en-US" altLang="ko-KR" sz="2000" b="1" spc="-100">
+                <a:solidFill>
+                  <a:prstClr val="black"/>
+                </a:solidFill>
+                <a:latin typeface="맑은 고딕" panose="020B0503020000020004" pitchFamily="50" charset="-127"/>
+                <a:ea typeface="맑은 고딕" panose="020B0503020000020004" pitchFamily="50" charset="-127"/>
+              </a:rPr>
+              <a:t>3</a:t>
+            </a:r>
+            <a:r>
+              <a:rPr lang="ko-KR" altLang="en-US" sz="2000" b="1" spc="-100">
+                <a:solidFill>
+                  <a:prstClr val="black"/>
+                </a:solidFill>
+                <a:latin typeface="맑은 고딕" panose="020B0503020000020004" pitchFamily="50" charset="-127"/>
+                <a:ea typeface="맑은 고딕" panose="020B0503020000020004" pitchFamily="50" charset="-127"/>
+              </a:rPr>
+              <a:t>주간 개발 여정</a:t>
             </a:r>
             <a:endParaRPr kumimoji="0" lang="ko-KR" altLang="en-US" sz="2000" b="1" i="0" u="none" strike="noStrike" kern="1200" cap="none" spc="-100" normalizeH="0" baseline="0" noProof="0" dirty="0">
               <a:ln>
@@ -10284,7 +10236,7 @@
     </p:spTree>
     <p:extLst>
       <p:ext uri="{BB962C8B-B14F-4D97-AF65-F5344CB8AC3E}">
-        <p14:creationId xmlns:p14="http://schemas.microsoft.com/office/powerpoint/2010/main" val="731787589"/>
+        <p14:creationId xmlns:p14="http://schemas.microsoft.com/office/powerpoint/2010/main" val="1564718616"/>
       </p:ext>
     </p:extLst>
   </p:cSld>

--- a/presentation/submission/260916_AI활용_업무지침네비게이터_6차 수정.pptx
+++ b/presentation/submission/260916_AI활용_업무지침네비게이터_6차 수정.pptx
@@ -10,7 +10,7 @@
   <p:sldIdLst>
     <p:sldId id="256" r:id="rId2"/>
     <p:sldId id="284" r:id="rId3"/>
-    <p:sldId id="289" r:id="rId4"/>
+    <p:sldId id="285" r:id="rId4"/>
     <p:sldId id="279" r:id="rId5"/>
     <p:sldId id="287" r:id="rId6"/>
     <p:sldId id="280" r:id="rId7"/>
@@ -9356,15 +9356,7 @@
             </a:pPr>
             <a:r>
               <a:rPr lang="ko-KR" altLang="en-US" sz="1300"/>
-              <a:t> 질문의 </a:t>
-            </a:r>
-            <a:r>
-              <a:rPr lang="ko-KR" altLang="en-US" sz="1300" b="1">
-                <a:solidFill>
-                  <a:srgbClr val="0000FF"/>
-                </a:solidFill>
-              </a:rPr>
-              <a:t>키워드</a:t>
+              <a:t> 질문의 키워드</a:t>
             </a:r>
             <a:r>
               <a:rPr lang="en-US" altLang="ko-KR" sz="1300"/>
@@ -9399,10 +9391,22 @@
             </a:r>
             <a:r>
               <a:rPr lang="ko-KR" altLang="en-US" sz="1300"/>
-              <a:t>사전에 정의한 규칙 기반 부서</a:t>
-            </a:r>
-            <a:r>
-              <a:rPr lang="en-US" altLang="ko-KR" sz="1300"/>
+              <a:t>사전에 정의한 </a:t>
+            </a:r>
+            <a:r>
+              <a:rPr lang="ko-KR" altLang="en-US" sz="1300" b="1">
+                <a:solidFill>
+                  <a:srgbClr val="0000FF"/>
+                </a:solidFill>
+              </a:rPr>
+              <a:t>규칙 기반 부서</a:t>
+            </a:r>
+            <a:r>
+              <a:rPr lang="en-US" altLang="ko-KR" sz="1300" b="1">
+                <a:solidFill>
+                  <a:srgbClr val="0000FF"/>
+                </a:solidFill>
+              </a:rPr>
               <a:t> </a:t>
             </a:r>
             <a:r>
@@ -10236,7 +10240,7 @@
     </p:spTree>
     <p:extLst>
       <p:ext uri="{BB962C8B-B14F-4D97-AF65-F5344CB8AC3E}">
-        <p14:creationId xmlns:p14="http://schemas.microsoft.com/office/powerpoint/2010/main" val="1564718616"/>
+        <p14:creationId xmlns:p14="http://schemas.microsoft.com/office/powerpoint/2010/main" val="731787589"/>
       </p:ext>
     </p:extLst>
   </p:cSld>
